--- a/Documentation/Slides/Week_15.pptx
+++ b/Documentation/Slides/Week_15.pptx
@@ -3063,7 +3063,7 @@
           <a:p>
             <a:fld id="{01926CF7-48D8-2F46-AFC8-8A5D2298DFDD}" type="datetimeFigureOut">
               <a:rPr lang="en-US" smtClean="0"/>
-              <a:t>12/8/25</a:t>
+              <a:t>12/12/25</a:t>
             </a:fld>
             <a:endParaRPr lang="en-US"/>
           </a:p>
@@ -16473,10 +16473,9 @@
           <a:lstStyle/>
           <a:p>
             <a:r>
-              <a:rPr lang="en-US"/>
-              <a:t>12/08/2025</a:t>
-            </a:r>
-            <a:endParaRPr lang="en-US" dirty="0"/>
+              <a:rPr lang="en-US" dirty="0"/>
+              <a:t>12/12/2025</a:t>
+            </a:r>
           </a:p>
         </p:txBody>
       </p:sp>
@@ -16682,8 +16681,8 @@
               </a:spcAft>
             </a:pPr>
             <a:r>
-              <a:rPr lang="en-US"/>
-              <a:t>3/31/23            ‹#›</a:t>
+              <a:rPr lang="en-US" dirty="0"/>
+              <a:t>10/13</a:t>
             </a:r>
           </a:p>
         </p:txBody>
@@ -17089,8 +17088,8 @@
               </a:spcAft>
             </a:pPr>
             <a:r>
-              <a:rPr lang="en-US"/>
-              <a:t>3/31/23            ‹#›</a:t>
+              <a:rPr lang="en-US" dirty="0"/>
+              <a:t>11/13</a:t>
             </a:r>
           </a:p>
         </p:txBody>
@@ -17603,7 +17602,7 @@
             <a:pPr algn="r"/>
             <a:r>
               <a:rPr lang="en-US" dirty="0"/>
-              <a:t>6/7</a:t>
+              <a:t>12/13</a:t>
             </a:r>
           </a:p>
         </p:txBody>
@@ -17905,7 +17904,7 @@
             <a:pPr algn="r"/>
             <a:r>
               <a:rPr lang="en-US" dirty="0"/>
-              <a:t>2/7</a:t>
+              <a:t>2/13</a:t>
             </a:r>
           </a:p>
         </p:txBody>
@@ -18327,12 +18326,12 @@
               </a:spcAft>
             </a:pPr>
             <a:r>
-              <a:rPr lang="en-US" kern="1200">
+              <a:rPr lang="en-US" kern="1200" dirty="0">
                 <a:latin typeface="Acumin Pro" panose="020B0504020202020204" pitchFamily="34" charset="77"/>
                 <a:ea typeface="+mn-ea"/>
                 <a:cs typeface="+mn-cs"/>
               </a:rPr>
-              <a:t>3/7</a:t>
+              <a:t>3/13</a:t>
             </a:r>
           </a:p>
         </p:txBody>
@@ -18515,12 +18514,12 @@
               </a:spcAft>
             </a:pPr>
             <a:r>
-              <a:rPr lang="en-US" kern="1200">
+              <a:rPr lang="en-US" kern="1200" dirty="0">
                 <a:latin typeface="Acumin Pro" panose="020B0504020202020204" pitchFamily="34" charset="77"/>
                 <a:ea typeface="+mn-ea"/>
                 <a:cs typeface="+mn-cs"/>
               </a:rPr>
-              <a:t>3/7</a:t>
+              <a:t>4/13</a:t>
             </a:r>
           </a:p>
         </p:txBody>
@@ -18669,7 +18668,7 @@
             <a:pPr algn="r"/>
             <a:r>
               <a:rPr lang="en-US" dirty="0"/>
-              <a:t>3/7</a:t>
+              <a:t>5/13</a:t>
             </a:r>
           </a:p>
         </p:txBody>
@@ -19045,8 +19044,8 @@
               </a:spcAft>
             </a:pPr>
             <a:r>
-              <a:rPr lang="en-US"/>
-              <a:t>3/31/23            ‹#›</a:t>
+              <a:rPr lang="en-US" dirty="0"/>
+              <a:t>6/13</a:t>
             </a:r>
           </a:p>
         </p:txBody>
@@ -19334,7 +19333,7 @@
             <a:pPr algn="r"/>
             <a:r>
               <a:rPr lang="en-US" dirty="0"/>
-              <a:t>3/7</a:t>
+              <a:t>7/13</a:t>
             </a:r>
           </a:p>
         </p:txBody>
@@ -19669,8 +19668,8 @@
               </a:spcAft>
             </a:pPr>
             <a:r>
-              <a:rPr lang="en-US"/>
-              <a:t>3/31/23            ‹#›</a:t>
+              <a:rPr lang="en-US" dirty="0"/>
+              <a:t>8/13</a:t>
             </a:r>
           </a:p>
         </p:txBody>
@@ -20050,8 +20049,8 @@
               </a:spcAft>
             </a:pPr>
             <a:r>
-              <a:rPr lang="en-US"/>
-              <a:t>3/31/23            ‹#›</a:t>
+              <a:rPr lang="en-US" dirty="0"/>
+              <a:t>9/13</a:t>
             </a:r>
           </a:p>
         </p:txBody>
@@ -20886,6 +20885,15 @@
 </file>
 
 <file path=customXml/item1.xml><?xml version="1.0" encoding="utf-8"?>
+<?mso-contentType ?>
+<FormTemplates xmlns="http://schemas.microsoft.com/sharepoint/v3/contenttype/forms">
+  <Display>DocumentLibraryForm</Display>
+  <Edit>DocumentLibraryForm</Edit>
+  <New>DocumentLibraryForm</New>
+</FormTemplates>
+</file>
+
+<file path=customXml/item2.xml><?xml version="1.0" encoding="utf-8"?>
 <ct:contentTypeSchema xmlns:ct="http://schemas.microsoft.com/office/2006/metadata/contentType" xmlns:ma="http://schemas.microsoft.com/office/2006/metadata/properties/metaAttributes" ct:_="" ma:_="" ma:contentTypeName="Document" ma:contentTypeID="0x01010054E202481DC1CB46AA011D949D311478" ma:contentTypeVersion="13" ma:contentTypeDescription="Create a new document." ma:contentTypeScope="" ma:versionID="309c718596e4092f54ce9aa93358bb8d">
   <xsd:schema xmlns:xsd="http://www.w3.org/2001/XMLSchema" xmlns:xs="http://www.w3.org/2001/XMLSchema" xmlns:p="http://schemas.microsoft.com/office/2006/metadata/properties" xmlns:ns2="37af3f4b-4b66-46f9-8456-831d9bc3e737" xmlns:ns3="d6656b4d-3fa0-4709-acfb-d5e813445d1e" targetNamespace="http://schemas.microsoft.com/office/2006/metadata/properties" ma:root="true" ma:fieldsID="0c34f3e70276db9d2471c2526b8de3df" ns2:_="" ns3:_="">
     <xsd:import namespace="37af3f4b-4b66-46f9-8456-831d9bc3e737"/>
@@ -21108,15 +21116,6 @@
 </ct:contentTypeSchema>
 </file>
 
-<file path=customXml/item2.xml><?xml version="1.0" encoding="utf-8"?>
-<?mso-contentType ?>
-<FormTemplates xmlns="http://schemas.microsoft.com/sharepoint/v3/contenttype/forms">
-  <Display>DocumentLibraryForm</Display>
-  <Edit>DocumentLibraryForm</Edit>
-  <New>DocumentLibraryForm</New>
-</FormTemplates>
-</file>
-
 <file path=customXml/item3.xml><?xml version="1.0" encoding="utf-8"?>
 <p:properties xmlns:p="http://schemas.microsoft.com/office/2006/metadata/properties" xmlns:xsi="http://www.w3.org/2001/XMLSchema-instance" xmlns:pc="http://schemas.microsoft.com/office/infopath/2007/PartnerControls">
   <documentManagement>
@@ -21161,6 +21160,14 @@
 </file>
 
 <file path=customXml/itemProps1.xml><?xml version="1.0" encoding="utf-8"?>
+<ds:datastoreItem xmlns:ds="http://schemas.openxmlformats.org/officeDocument/2006/customXml" ds:itemID="{F5B64EEB-1B4A-4920-AA44-E234D7D487D1}">
+  <ds:schemaRefs>
+    <ds:schemaRef ds:uri="http://schemas.microsoft.com/sharepoint/v3/contenttype/forms"/>
+  </ds:schemaRefs>
+</ds:datastoreItem>
+</file>
+
+<file path=customXml/itemProps2.xml><?xml version="1.0" encoding="utf-8"?>
 <ds:datastoreItem xmlns:ds="http://schemas.openxmlformats.org/officeDocument/2006/customXml" ds:itemID="{64D795B0-FAA0-424A-9B96-7691ED1EF26B}">
   <ds:schemaRefs>
     <ds:schemaRef ds:uri="http://schemas.microsoft.com/office/2006/metadata/contentType"/>
@@ -21175,14 +21182,6 @@
     <ds:schemaRef ds:uri="http://purl.org/dc/elements/1.1/"/>
     <ds:schemaRef ds:uri="http://purl.org/dc/terms/"/>
     <ds:schemaRef ds:uri="http://schemas.microsoft.com/internal/obd"/>
-  </ds:schemaRefs>
-</ds:datastoreItem>
-</file>
-
-<file path=customXml/itemProps2.xml><?xml version="1.0" encoding="utf-8"?>
-<ds:datastoreItem xmlns:ds="http://schemas.openxmlformats.org/officeDocument/2006/customXml" ds:itemID="{F5B64EEB-1B4A-4920-AA44-E234D7D487D1}">
-  <ds:schemaRefs>
-    <ds:schemaRef ds:uri="http://schemas.microsoft.com/sharepoint/v3/contenttype/forms"/>
   </ds:schemaRefs>
 </ds:datastoreItem>
 </file>
